--- a/notebooks/Model_Results_Comparison.pptx
+++ b/notebooks/Model_Results_Comparison.pptx
@@ -312,7 +312,7 @@
           <a:p>
             <a:fld id="{5BCAD085-E8A6-8845-BD4E-CB4CCA059FC4}" type="datetimeFigureOut">
               <a:rPr lang="en-US" smtClean="0"/>
-              <a:t>10/10/25</a:t>
+              <a:t>10/12/25</a:t>
             </a:fld>
             <a:endParaRPr lang="en-US"/>
           </a:p>
@@ -480,7 +480,7 @@
           <a:p>
             <a:fld id="{5BCAD085-E8A6-8845-BD4E-CB4CCA059FC4}" type="datetimeFigureOut">
               <a:rPr lang="en-US" smtClean="0"/>
-              <a:t>10/10/25</a:t>
+              <a:t>10/12/25</a:t>
             </a:fld>
             <a:endParaRPr lang="en-US"/>
           </a:p>
@@ -658,7 +658,7 @@
           <a:p>
             <a:fld id="{5BCAD085-E8A6-8845-BD4E-CB4CCA059FC4}" type="datetimeFigureOut">
               <a:rPr lang="en-US" smtClean="0"/>
-              <a:t>10/10/25</a:t>
+              <a:t>10/12/25</a:t>
             </a:fld>
             <a:endParaRPr lang="en-US"/>
           </a:p>
@@ -826,7 +826,7 @@
           <a:p>
             <a:fld id="{5BCAD085-E8A6-8845-BD4E-CB4CCA059FC4}" type="datetimeFigureOut">
               <a:rPr lang="en-US" smtClean="0"/>
-              <a:t>10/10/25</a:t>
+              <a:t>10/12/25</a:t>
             </a:fld>
             <a:endParaRPr lang="en-US"/>
           </a:p>
@@ -1071,7 +1071,7 @@
           <a:p>
             <a:fld id="{5BCAD085-E8A6-8845-BD4E-CB4CCA059FC4}" type="datetimeFigureOut">
               <a:rPr lang="en-US" smtClean="0"/>
-              <a:t>10/10/25</a:t>
+              <a:t>10/12/25</a:t>
             </a:fld>
             <a:endParaRPr lang="en-US"/>
           </a:p>
@@ -1356,7 +1356,7 @@
           <a:p>
             <a:fld id="{5BCAD085-E8A6-8845-BD4E-CB4CCA059FC4}" type="datetimeFigureOut">
               <a:rPr lang="en-US" smtClean="0"/>
-              <a:t>10/10/25</a:t>
+              <a:t>10/12/25</a:t>
             </a:fld>
             <a:endParaRPr lang="en-US"/>
           </a:p>
@@ -1775,7 +1775,7 @@
           <a:p>
             <a:fld id="{5BCAD085-E8A6-8845-BD4E-CB4CCA059FC4}" type="datetimeFigureOut">
               <a:rPr lang="en-US" smtClean="0"/>
-              <a:t>10/10/25</a:t>
+              <a:t>10/12/25</a:t>
             </a:fld>
             <a:endParaRPr lang="en-US"/>
           </a:p>
@@ -1892,7 +1892,7 @@
           <a:p>
             <a:fld id="{5BCAD085-E8A6-8845-BD4E-CB4CCA059FC4}" type="datetimeFigureOut">
               <a:rPr lang="en-US" smtClean="0"/>
-              <a:t>10/10/25</a:t>
+              <a:t>10/12/25</a:t>
             </a:fld>
             <a:endParaRPr lang="en-US"/>
           </a:p>
@@ -1987,7 +1987,7 @@
           <a:p>
             <a:fld id="{5BCAD085-E8A6-8845-BD4E-CB4CCA059FC4}" type="datetimeFigureOut">
               <a:rPr lang="en-US" smtClean="0"/>
-              <a:t>10/10/25</a:t>
+              <a:t>10/12/25</a:t>
             </a:fld>
             <a:endParaRPr lang="en-US"/>
           </a:p>
@@ -2262,7 +2262,7 @@
           <a:p>
             <a:fld id="{5BCAD085-E8A6-8845-BD4E-CB4CCA059FC4}" type="datetimeFigureOut">
               <a:rPr lang="en-US" smtClean="0"/>
-              <a:t>10/10/25</a:t>
+              <a:t>10/12/25</a:t>
             </a:fld>
             <a:endParaRPr lang="en-US"/>
           </a:p>
@@ -2514,7 +2514,7 @@
           <a:p>
             <a:fld id="{5BCAD085-E8A6-8845-BD4E-CB4CCA059FC4}" type="datetimeFigureOut">
               <a:rPr lang="en-US" smtClean="0"/>
-              <a:t>10/10/25</a:t>
+              <a:t>10/12/25</a:t>
             </a:fld>
             <a:endParaRPr lang="en-US"/>
           </a:p>
@@ -2725,7 +2725,7 @@
           <a:p>
             <a:fld id="{5BCAD085-E8A6-8845-BD4E-CB4CCA059FC4}" type="datetimeFigureOut">
               <a:rPr lang="en-US" smtClean="0"/>
-              <a:t>10/10/25</a:t>
+              <a:t>10/12/25</a:t>
             </a:fld>
             <a:endParaRPr lang="en-US"/>
           </a:p>
@@ -3723,15 +3723,27 @@
       </p:sp>
       <p:graphicFrame>
         <p:nvGraphicFramePr>
-          <p:cNvPr id="4" name="Table 3"/>
+          <p:cNvPr id="3" name="Table 2">
+            <a:extLst>
+              <a:ext uri="{FF2B5EF4-FFF2-40B4-BE49-F238E27FC236}">
+                <a16:creationId xmlns:a16="http://schemas.microsoft.com/office/drawing/2014/main" id="{1377A5BB-4919-2D35-A354-A6B813047EBE}"/>
+              </a:ext>
+            </a:extLst>
+          </p:cNvPr>
           <p:cNvGraphicFramePr>
             <a:graphicFrameLocks noGrp="1"/>
           </p:cNvGraphicFramePr>
-          <p:nvPr/>
+          <p:nvPr>
+            <p:extLst>
+              <p:ext uri="{D42A27DB-BD31-4B8C-83A1-F6EECF244321}">
+                <p14:modId xmlns:p14="http://schemas.microsoft.com/office/powerpoint/2010/main" val="1295624909"/>
+              </p:ext>
+            </p:extLst>
+          </p:nvPr>
         </p:nvGraphicFramePr>
         <p:xfrm>
-          <a:off x="457200" y="1371600"/>
-          <a:ext cx="10972800" cy="3657600"/>
+          <a:off x="1287517" y="1476703"/>
+          <a:ext cx="9475078" cy="4461642"/>
         </p:xfrm>
         <a:graphic>
           <a:graphicData uri="http://schemas.openxmlformats.org/drawingml/2006/table">
@@ -3740,70 +3752,74 @@
                 <a:tableStyleId>{5C22544A-7EE6-4342-B048-85BDC9FD1C3A}</a:tableStyleId>
               </a:tblPr>
               <a:tblGrid>
-                <a:gridCol w="1828800">
+                <a:gridCol w="1895014">
                   <a:extLst>
                     <a:ext uri="{9D8B030D-6E8A-4147-A177-3AD203B41FA5}">
                       <a16:colId xmlns:a16="http://schemas.microsoft.com/office/drawing/2014/main" val="20000"/>
                     </a:ext>
                   </a:extLst>
                 </a:gridCol>
-                <a:gridCol w="1828800">
+                <a:gridCol w="1263344">
                   <a:extLst>
                     <a:ext uri="{9D8B030D-6E8A-4147-A177-3AD203B41FA5}">
                       <a16:colId xmlns:a16="http://schemas.microsoft.com/office/drawing/2014/main" val="20001"/>
                     </a:ext>
                   </a:extLst>
                 </a:gridCol>
-                <a:gridCol w="1828800">
+                <a:gridCol w="1263344">
                   <a:extLst>
                     <a:ext uri="{9D8B030D-6E8A-4147-A177-3AD203B41FA5}">
                       <a16:colId xmlns:a16="http://schemas.microsoft.com/office/drawing/2014/main" val="20002"/>
                     </a:ext>
                   </a:extLst>
                 </a:gridCol>
-                <a:gridCol w="1828800">
+                <a:gridCol w="1263344">
                   <a:extLst>
                     <a:ext uri="{9D8B030D-6E8A-4147-A177-3AD203B41FA5}">
                       <a16:colId xmlns:a16="http://schemas.microsoft.com/office/drawing/2014/main" val="20003"/>
                     </a:ext>
                   </a:extLst>
                 </a:gridCol>
-                <a:gridCol w="1828800">
+                <a:gridCol w="1263344">
                   <a:extLst>
                     <a:ext uri="{9D8B030D-6E8A-4147-A177-3AD203B41FA5}">
                       <a16:colId xmlns:a16="http://schemas.microsoft.com/office/drawing/2014/main" val="20004"/>
                     </a:ext>
                   </a:extLst>
                 </a:gridCol>
-                <a:gridCol w="1828800">
+                <a:gridCol w="1263344">
                   <a:extLst>
                     <a:ext uri="{9D8B030D-6E8A-4147-A177-3AD203B41FA5}">
                       <a16:colId xmlns:a16="http://schemas.microsoft.com/office/drawing/2014/main" val="20005"/>
                     </a:ext>
                   </a:extLst>
                 </a:gridCol>
+                <a:gridCol w="1263344">
+                  <a:extLst>
+                    <a:ext uri="{9D8B030D-6E8A-4147-A177-3AD203B41FA5}">
+                      <a16:colId xmlns:a16="http://schemas.microsoft.com/office/drawing/2014/main" val="20006"/>
+                    </a:ext>
+                  </a:extLst>
+                </a:gridCol>
               </a:tblGrid>
-              <a:tr h="731520">
+              <a:tr h="743607">
                 <a:tc>
                   <a:txBody>
                     <a:bodyPr/>
                     <a:lstStyle/>
                     <a:p>
-                      <a:pPr>
-                        <a:defRPr sz="1400" b="1">
-                          <a:solidFill>
-                            <a:srgbClr val="FFFFFF"/>
-                          </a:solidFill>
-                        </a:defRPr>
+                      <a:pPr algn="ctr">
+                        <a:defRPr sz="1200" b="1"/>
                       </a:pPr>
                       <a:r>
+                        <a:rPr dirty="0"/>
                         <a:t>Model</a:t>
                       </a:r>
                     </a:p>
                   </a:txBody>
                   <a:tcPr>
                     <a:solidFill>
-                      <a:srgbClr val="0066CC"/>
+                      <a:srgbClr val="002060"/>
                     </a:solidFill>
                   </a:tcPr>
                 </a:tc>
@@ -3812,21 +3828,18 @@
                     <a:bodyPr/>
                     <a:lstStyle/>
                     <a:p>
-                      <a:pPr>
-                        <a:defRPr sz="1400" b="1">
-                          <a:solidFill>
-                            <a:srgbClr val="FFFFFF"/>
-                          </a:solidFill>
-                        </a:defRPr>
+                      <a:pPr algn="ctr">
+                        <a:defRPr sz="1200" b="1"/>
                       </a:pPr>
                       <a:r>
+                        <a:rPr dirty="0"/>
                         <a:t>Accuracy</a:t>
                       </a:r>
                     </a:p>
                   </a:txBody>
                   <a:tcPr>
                     <a:solidFill>
-                      <a:srgbClr val="0066CC"/>
+                      <a:srgbClr val="002060"/>
                     </a:solidFill>
                   </a:tcPr>
                 </a:tc>
@@ -3835,21 +3848,18 @@
                     <a:bodyPr/>
                     <a:lstStyle/>
                     <a:p>
-                      <a:pPr>
-                        <a:defRPr sz="1400" b="1">
-                          <a:solidFill>
-                            <a:srgbClr val="FFFFFF"/>
-                          </a:solidFill>
-                        </a:defRPr>
+                      <a:pPr algn="ctr">
+                        <a:defRPr sz="1200" b="1"/>
                       </a:pPr>
                       <a:r>
-                        <a:t>F1-Score</a:t>
+                        <a:rPr dirty="0"/>
+                        <a:t>Precision</a:t>
                       </a:r>
                     </a:p>
                   </a:txBody>
                   <a:tcPr>
                     <a:solidFill>
-                      <a:srgbClr val="0066CC"/>
+                      <a:srgbClr val="002060"/>
                     </a:solidFill>
                   </a:tcPr>
                 </a:tc>
@@ -3858,21 +3868,18 @@
                     <a:bodyPr/>
                     <a:lstStyle/>
                     <a:p>
-                      <a:pPr>
-                        <a:defRPr sz="1400" b="1">
-                          <a:solidFill>
-                            <a:srgbClr val="FFFFFF"/>
-                          </a:solidFill>
-                        </a:defRPr>
+                      <a:pPr algn="ctr">
+                        <a:defRPr sz="1200" b="1"/>
                       </a:pPr>
                       <a:r>
-                        <a:t>ROC-AUC</a:t>
+                        <a:rPr dirty="0"/>
+                        <a:t>Recall</a:t>
                       </a:r>
                     </a:p>
                   </a:txBody>
                   <a:tcPr>
                     <a:solidFill>
-                      <a:srgbClr val="0066CC"/>
+                      <a:srgbClr val="002060"/>
                     </a:solidFill>
                   </a:tcPr>
                 </a:tc>
@@ -3881,21 +3888,18 @@
                     <a:bodyPr/>
                     <a:lstStyle/>
                     <a:p>
-                      <a:pPr>
-                        <a:defRPr sz="1400" b="1">
-                          <a:solidFill>
-                            <a:srgbClr val="FFFFFF"/>
-                          </a:solidFill>
-                        </a:defRPr>
+                      <a:pPr algn="ctr">
+                        <a:defRPr sz="1200" b="1"/>
                       </a:pPr>
                       <a:r>
-                        <a:t>Training Time</a:t>
+                        <a:rPr dirty="0"/>
+                        <a:t>F1-Score</a:t>
                       </a:r>
                     </a:p>
                   </a:txBody>
                   <a:tcPr>
                     <a:solidFill>
-                      <a:srgbClr val="0066CC"/>
+                      <a:srgbClr val="002060"/>
                     </a:solidFill>
                   </a:tcPr>
                 </a:tc>
@@ -3904,21 +3908,38 @@
                     <a:bodyPr/>
                     <a:lstStyle/>
                     <a:p>
-                      <a:pPr>
-                        <a:defRPr sz="1400" b="1">
-                          <a:solidFill>
-                            <a:srgbClr val="FFFFFF"/>
-                          </a:solidFill>
-                        </a:defRPr>
+                      <a:pPr algn="ctr">
+                        <a:defRPr sz="1200" b="1"/>
                       </a:pPr>
                       <a:r>
-                        <a:t>Complexity</a:t>
+                        <a:rPr dirty="0"/>
+                        <a:t>ROC-AUC</a:t>
                       </a:r>
                     </a:p>
                   </a:txBody>
                   <a:tcPr>
                     <a:solidFill>
-                      <a:srgbClr val="0066CC"/>
+                      <a:srgbClr val="002060"/>
+                    </a:solidFill>
+                  </a:tcPr>
+                </a:tc>
+                <a:tc>
+                  <a:txBody>
+                    <a:bodyPr/>
+                    <a:lstStyle/>
+                    <a:p>
+                      <a:pPr algn="ctr">
+                        <a:defRPr sz="1200" b="1"/>
+                      </a:pPr>
+                      <a:r>
+                        <a:rPr dirty="0"/>
+                        <a:t>Training Time</a:t>
+                      </a:r>
+                    </a:p>
+                  </a:txBody>
+                  <a:tcPr>
+                    <a:solidFill>
+                      <a:srgbClr val="002060"/>
                     </a:solidFill>
                   </a:tcPr>
                 </a:tc>
@@ -3928,29 +3949,33 @@
                   </a:ext>
                 </a:extLst>
               </a:tr>
-              <a:tr h="731520">
+              <a:tr h="743607">
                 <a:tc>
                   <a:txBody>
                     <a:bodyPr/>
                     <a:lstStyle/>
                     <a:p>
-                      <a:pPr>
-                        <a:defRPr sz="1200"/>
+                      <a:pPr algn="ctr">
+                        <a:defRPr sz="1100"/>
                       </a:pPr>
                       <a:r>
                         <a:t>Linear SVM</a:t>
                       </a:r>
                     </a:p>
                   </a:txBody>
-                  <a:tcPr/>
+                  <a:tcPr>
+                    <a:solidFill>
+                      <a:srgbClr val="90EE90"/>
+                    </a:solidFill>
+                  </a:tcPr>
                 </a:tc>
                 <a:tc>
                   <a:txBody>
                     <a:bodyPr/>
                     <a:lstStyle/>
                     <a:p>
-                      <a:pPr>
-                        <a:defRPr sz="1200" b="1"/>
+                      <a:pPr algn="ctr">
+                        <a:defRPr sz="1100"/>
                       </a:pPr>
                       <a:r>
                         <a:t>99.71%</a:t>
@@ -3959,7 +3984,7 @@
                   </a:txBody>
                   <a:tcPr>
                     <a:solidFill>
-                      <a:srgbClr val="66CC66"/>
+                      <a:srgbClr val="90EE90"/>
                     </a:solidFill>
                   </a:tcPr>
                 </a:tc>
@@ -3968,17 +3993,17 @@
                     <a:bodyPr/>
                     <a:lstStyle/>
                     <a:p>
-                      <a:pPr>
-                        <a:defRPr sz="1200" b="1"/>
+                      <a:pPr algn="ctr">
+                        <a:defRPr sz="1100"/>
                       </a:pPr>
                       <a:r>
-                        <a:t>99.70%</a:t>
+                        <a:t>~99.7%</a:t>
                       </a:r>
                     </a:p>
                   </a:txBody>
                   <a:tcPr>
                     <a:solidFill>
-                      <a:srgbClr val="66CC66"/>
+                      <a:srgbClr val="90EE90"/>
                     </a:solidFill>
                   </a:tcPr>
                 </a:tc>
@@ -3987,8 +4012,46 @@
                     <a:bodyPr/>
                     <a:lstStyle/>
                     <a:p>
-                      <a:pPr>
-                        <a:defRPr sz="1200" b="1"/>
+                      <a:pPr algn="ctr">
+                        <a:defRPr sz="1100"/>
+                      </a:pPr>
+                      <a:r>
+                        <a:t>~99.7%</a:t>
+                      </a:r>
+                    </a:p>
+                  </a:txBody>
+                  <a:tcPr>
+                    <a:solidFill>
+                      <a:srgbClr val="90EE90"/>
+                    </a:solidFill>
+                  </a:tcPr>
+                </a:tc>
+                <a:tc>
+                  <a:txBody>
+                    <a:bodyPr/>
+                    <a:lstStyle/>
+                    <a:p>
+                      <a:pPr algn="ctr">
+                        <a:defRPr sz="1100"/>
+                      </a:pPr>
+                      <a:r>
+                        <a:t>~99.7%</a:t>
+                      </a:r>
+                    </a:p>
+                  </a:txBody>
+                  <a:tcPr>
+                    <a:solidFill>
+                      <a:srgbClr val="90EE90"/>
+                    </a:solidFill>
+                  </a:tcPr>
+                </a:tc>
+                <a:tc>
+                  <a:txBody>
+                    <a:bodyPr/>
+                    <a:lstStyle/>
+                    <a:p>
+                      <a:pPr algn="ctr">
+                        <a:defRPr sz="1100"/>
                       </a:pPr>
                       <a:r>
                         <a:t>1.000</a:t>
@@ -3997,7 +4060,7 @@
                   </a:txBody>
                   <a:tcPr>
                     <a:solidFill>
-                      <a:srgbClr val="66CC66"/>
+                      <a:srgbClr val="90EE90"/>
                     </a:solidFill>
                   </a:tcPr>
                 </a:tc>
@@ -4006,30 +4069,19 @@
                     <a:bodyPr/>
                     <a:lstStyle/>
                     <a:p>
-                      <a:pPr>
-                        <a:defRPr sz="1200"/>
+                      <a:pPr algn="ctr">
+                        <a:defRPr sz="1100"/>
                       </a:pPr>
                       <a:r>
                         <a:t>0.28s</a:t>
                       </a:r>
                     </a:p>
                   </a:txBody>
-                  <a:tcPr/>
-                </a:tc>
-                <a:tc>
-                  <a:txBody>
-                    <a:bodyPr/>
-                    <a:lstStyle/>
-                    <a:p>
-                      <a:pPr>
-                        <a:defRPr sz="1200"/>
-                      </a:pPr>
-                      <a:r>
-                        <a:t>Low</a:t>
-                      </a:r>
-                    </a:p>
-                  </a:txBody>
-                  <a:tcPr/>
+                  <a:tcPr>
+                    <a:solidFill>
+                      <a:srgbClr val="90EE90"/>
+                    </a:solidFill>
+                  </a:tcPr>
                 </a:tc>
                 <a:extLst>
                   <a:ext uri="{0D108BD9-81ED-4DB2-BD59-A6C34878D82A}">
@@ -4037,14 +4089,14 @@
                   </a:ext>
                 </a:extLst>
               </a:tr>
-              <a:tr h="731520">
+              <a:tr h="743607">
                 <a:tc>
                   <a:txBody>
                     <a:bodyPr/>
                     <a:lstStyle/>
                     <a:p>
-                      <a:pPr>
-                        <a:defRPr sz="1200"/>
+                      <a:pPr algn="ctr">
+                        <a:defRPr sz="1100"/>
                       </a:pPr>
                       <a:r>
                         <a:t>Logistic Regression</a:t>
@@ -4058,11 +4110,11 @@
                     <a:bodyPr/>
                     <a:lstStyle/>
                     <a:p>
-                      <a:pPr>
-                        <a:defRPr sz="1200"/>
+                      <a:pPr algn="ctr">
+                        <a:defRPr sz="1100"/>
                       </a:pPr>
                       <a:r>
-                        <a:t>99.40%</a:t>
+                        <a:t>~99.40%</a:t>
                       </a:r>
                     </a:p>
                   </a:txBody>
@@ -4073,11 +4125,11 @@
                     <a:bodyPr/>
                     <a:lstStyle/>
                     <a:p>
-                      <a:pPr>
-                        <a:defRPr sz="1200"/>
+                      <a:pPr algn="ctr">
+                        <a:defRPr sz="1100"/>
                       </a:pPr>
                       <a:r>
-                        <a:t>99.40%</a:t>
+                        <a:t>~99.4%</a:t>
                       </a:r>
                     </a:p>
                   </a:txBody>
@@ -4088,8 +4140,38 @@
                     <a:bodyPr/>
                     <a:lstStyle/>
                     <a:p>
-                      <a:pPr>
-                        <a:defRPr sz="1200"/>
+                      <a:pPr algn="ctr">
+                        <a:defRPr sz="1100"/>
+                      </a:pPr>
+                      <a:r>
+                        <a:t>~99.4%</a:t>
+                      </a:r>
+                    </a:p>
+                  </a:txBody>
+                  <a:tcPr/>
+                </a:tc>
+                <a:tc>
+                  <a:txBody>
+                    <a:bodyPr/>
+                    <a:lstStyle/>
+                    <a:p>
+                      <a:pPr algn="ctr">
+                        <a:defRPr sz="1100"/>
+                      </a:pPr>
+                      <a:r>
+                        <a:t>~99.4%</a:t>
+                      </a:r>
+                    </a:p>
+                  </a:txBody>
+                  <a:tcPr/>
+                </a:tc>
+                <a:tc>
+                  <a:txBody>
+                    <a:bodyPr/>
+                    <a:lstStyle/>
+                    <a:p>
+                      <a:pPr algn="ctr">
+                        <a:defRPr sz="1100"/>
                       </a:pPr>
                       <a:r>
                         <a:t>0.998</a:t>
@@ -4103,26 +4185,11 @@
                     <a:bodyPr/>
                     <a:lstStyle/>
                     <a:p>
-                      <a:pPr>
-                        <a:defRPr sz="1200"/>
+                      <a:pPr algn="ctr">
+                        <a:defRPr sz="1100"/>
                       </a:pPr>
                       <a:r>
-                        <a:t>1.2s</a:t>
-                      </a:r>
-                    </a:p>
-                  </a:txBody>
-                  <a:tcPr/>
-                </a:tc>
-                <a:tc>
-                  <a:txBody>
-                    <a:bodyPr/>
-                    <a:lstStyle/>
-                    <a:p>
-                      <a:pPr>
-                        <a:defRPr sz="1200"/>
-                      </a:pPr>
-                      <a:r>
-                        <a:t>Low</a:t>
+                        <a:t>Fast</a:t>
                       </a:r>
                     </a:p>
                   </a:txBody>
@@ -4134,14 +4201,14 @@
                   </a:ext>
                 </a:extLst>
               </a:tr>
-              <a:tr h="731520">
+              <a:tr h="743607">
                 <a:tc>
                   <a:txBody>
                     <a:bodyPr/>
                     <a:lstStyle/>
                     <a:p>
-                      <a:pPr>
-                        <a:defRPr sz="1200"/>
+                      <a:pPr algn="ctr">
+                        <a:defRPr sz="1100"/>
                       </a:pPr>
                       <a:r>
                         <a:t>Naive Bayes</a:t>
@@ -4155,11 +4222,12 @@
                     <a:bodyPr/>
                     <a:lstStyle/>
                     <a:p>
-                      <a:pPr>
-                        <a:defRPr sz="1200"/>
+                      <a:pPr algn="ctr">
+                        <a:defRPr sz="1100"/>
                       </a:pPr>
                       <a:r>
-                        <a:t>95.80%</a:t>
+                        <a:rPr dirty="0"/>
+                        <a:t>~95-96%</a:t>
                       </a:r>
                     </a:p>
                   </a:txBody>
@@ -4170,11 +4238,11 @@
                     <a:bodyPr/>
                     <a:lstStyle/>
                     <a:p>
-                      <a:pPr>
-                        <a:defRPr sz="1200"/>
+                      <a:pPr algn="ctr">
+                        <a:defRPr sz="1100"/>
                       </a:pPr>
                       <a:r>
-                        <a:t>95.80%</a:t>
+                        <a:t>~95%</a:t>
                       </a:r>
                     </a:p>
                   </a:txBody>
@@ -4185,11 +4253,12 @@
                     <a:bodyPr/>
                     <a:lstStyle/>
                     <a:p>
-                      <a:pPr>
-                        <a:defRPr sz="1200"/>
+                      <a:pPr algn="ctr">
+                        <a:defRPr sz="1100"/>
                       </a:pPr>
                       <a:r>
-                        <a:t>0.972</a:t>
+                        <a:rPr dirty="0"/>
+                        <a:t>~96%</a:t>
                       </a:r>
                     </a:p>
                   </a:txBody>
@@ -4200,11 +4269,11 @@
                     <a:bodyPr/>
                     <a:lstStyle/>
                     <a:p>
-                      <a:pPr>
-                        <a:defRPr sz="1200"/>
+                      <a:pPr algn="ctr">
+                        <a:defRPr sz="1100"/>
                       </a:pPr>
                       <a:r>
-                        <a:t>0.15s</a:t>
+                        <a:t>~95%</a:t>
                       </a:r>
                     </a:p>
                   </a:txBody>
@@ -4215,11 +4284,26 @@
                     <a:bodyPr/>
                     <a:lstStyle/>
                     <a:p>
-                      <a:pPr>
-                        <a:defRPr sz="1200"/>
+                      <a:pPr algn="ctr">
+                        <a:defRPr sz="1100"/>
                       </a:pPr>
                       <a:r>
-                        <a:t>Very Low</a:t>
+                        <a:t>~0.97</a:t>
+                      </a:r>
+                    </a:p>
+                  </a:txBody>
+                  <a:tcPr/>
+                </a:tc>
+                <a:tc>
+                  <a:txBody>
+                    <a:bodyPr/>
+                    <a:lstStyle/>
+                    <a:p>
+                      <a:pPr algn="ctr">
+                        <a:defRPr sz="1100"/>
+                      </a:pPr>
+                      <a:r>
+                        <a:t>Very Fast</a:t>
                       </a:r>
                     </a:p>
                   </a:txBody>
@@ -4231,14 +4315,14 @@
                   </a:ext>
                 </a:extLst>
               </a:tr>
-              <a:tr h="731520">
+              <a:tr h="743607">
                 <a:tc>
                   <a:txBody>
                     <a:bodyPr/>
                     <a:lstStyle/>
                     <a:p>
-                      <a:pPr>
-                        <a:defRPr sz="1200"/>
+                      <a:pPr algn="ctr">
+                        <a:defRPr sz="1100"/>
                       </a:pPr>
                       <a:r>
                         <a:t>CNN Simple</a:t>
@@ -4252,11 +4336,11 @@
                     <a:bodyPr/>
                     <a:lstStyle/>
                     <a:p>
-                      <a:pPr>
-                        <a:defRPr sz="1200"/>
+                      <a:pPr algn="ctr">
+                        <a:defRPr sz="1100"/>
                       </a:pPr>
                       <a:r>
-                        <a:t>97.50%</a:t>
+                        <a:t>~97-98%</a:t>
                       </a:r>
                     </a:p>
                   </a:txBody>
@@ -4267,11 +4351,11 @@
                     <a:bodyPr/>
                     <a:lstStyle/>
                     <a:p>
-                      <a:pPr>
-                        <a:defRPr sz="1200"/>
+                      <a:pPr algn="ctr">
+                        <a:defRPr sz="1100"/>
                       </a:pPr>
                       <a:r>
-                        <a:t>97.50%</a:t>
+                        <a:t>~97%</a:t>
                       </a:r>
                     </a:p>
                   </a:txBody>
@@ -4282,11 +4366,11 @@
                     <a:bodyPr/>
                     <a:lstStyle/>
                     <a:p>
-                      <a:pPr>
-                        <a:defRPr sz="1200"/>
+                      <a:pPr algn="ctr">
+                        <a:defRPr sz="1100"/>
                       </a:pPr>
                       <a:r>
-                        <a:t>0.989</a:t>
+                        <a:t>~98%</a:t>
                       </a:r>
                     </a:p>
                   </a:txBody>
@@ -4297,11 +4381,11 @@
                     <a:bodyPr/>
                     <a:lstStyle/>
                     <a:p>
-                      <a:pPr>
-                        <a:defRPr sz="1200"/>
+                      <a:pPr algn="ctr">
+                        <a:defRPr sz="1100"/>
                       </a:pPr>
                       <a:r>
-                        <a:t>180s</a:t>
+                        <a:t>~97%</a:t>
                       </a:r>
                     </a:p>
                   </a:txBody>
@@ -4312,11 +4396,26 @@
                     <a:bodyPr/>
                     <a:lstStyle/>
                     <a:p>
-                      <a:pPr>
-                        <a:defRPr sz="1200"/>
+                      <a:pPr algn="ctr">
+                        <a:defRPr sz="1100"/>
                       </a:pPr>
                       <a:r>
-                        <a:t>High</a:t>
+                        <a:t>~0.99</a:t>
+                      </a:r>
+                    </a:p>
+                  </a:txBody>
+                  <a:tcPr/>
+                </a:tc>
+                <a:tc>
+                  <a:txBody>
+                    <a:bodyPr/>
+                    <a:lstStyle/>
+                    <a:p>
+                      <a:pPr algn="ctr">
+                        <a:defRPr sz="1100"/>
+                      </a:pPr>
+                      <a:r>
+                        <a:t>Minutes</a:t>
                       </a:r>
                     </a:p>
                   </a:txBody>
@@ -4325,6 +4424,120 @@
                 <a:extLst>
                   <a:ext uri="{0D108BD9-81ED-4DB2-BD59-A6C34878D82A}">
                     <a16:rowId xmlns:a16="http://schemas.microsoft.com/office/drawing/2014/main" val="10004"/>
+                  </a:ext>
+                </a:extLst>
+              </a:tr>
+              <a:tr h="743607">
+                <a:tc>
+                  <a:txBody>
+                    <a:bodyPr/>
+                    <a:lstStyle/>
+                    <a:p>
+                      <a:pPr algn="ctr">
+                        <a:defRPr sz="1100"/>
+                      </a:pPr>
+                      <a:r>
+                        <a:rPr dirty="0"/>
+                        <a:t>CNN Multi-Filter</a:t>
+                      </a:r>
+                    </a:p>
+                  </a:txBody>
+                  <a:tcPr/>
+                </a:tc>
+                <a:tc>
+                  <a:txBody>
+                    <a:bodyPr/>
+                    <a:lstStyle/>
+                    <a:p>
+                      <a:pPr algn="ctr">
+                        <a:defRPr sz="1100"/>
+                      </a:pPr>
+                      <a:r>
+                        <a:t>~98-99%</a:t>
+                      </a:r>
+                    </a:p>
+                  </a:txBody>
+                  <a:tcPr/>
+                </a:tc>
+                <a:tc>
+                  <a:txBody>
+                    <a:bodyPr/>
+                    <a:lstStyle/>
+                    <a:p>
+                      <a:pPr algn="ctr">
+                        <a:defRPr sz="1100"/>
+                      </a:pPr>
+                      <a:r>
+                        <a:t>~98%</a:t>
+                      </a:r>
+                    </a:p>
+                  </a:txBody>
+                  <a:tcPr/>
+                </a:tc>
+                <a:tc>
+                  <a:txBody>
+                    <a:bodyPr/>
+                    <a:lstStyle/>
+                    <a:p>
+                      <a:pPr algn="ctr">
+                        <a:defRPr sz="1100"/>
+                      </a:pPr>
+                      <a:r>
+                        <a:t>~99%</a:t>
+                      </a:r>
+                    </a:p>
+                  </a:txBody>
+                  <a:tcPr/>
+                </a:tc>
+                <a:tc>
+                  <a:txBody>
+                    <a:bodyPr/>
+                    <a:lstStyle/>
+                    <a:p>
+                      <a:pPr algn="ctr">
+                        <a:defRPr sz="1100"/>
+                      </a:pPr>
+                      <a:r>
+                        <a:t>~98%</a:t>
+                      </a:r>
+                    </a:p>
+                  </a:txBody>
+                  <a:tcPr/>
+                </a:tc>
+                <a:tc>
+                  <a:txBody>
+                    <a:bodyPr/>
+                    <a:lstStyle/>
+                    <a:p>
+                      <a:pPr algn="ctr">
+                        <a:defRPr sz="1100"/>
+                      </a:pPr>
+                      <a:r>
+                        <a:t>~0.99</a:t>
+                      </a:r>
+                    </a:p>
+                  </a:txBody>
+                  <a:tcPr/>
+                </a:tc>
+                <a:tc>
+                  <a:txBody>
+                    <a:bodyPr/>
+                    <a:lstStyle/>
+                    <a:p>
+                      <a:pPr algn="ctr">
+                        <a:defRPr sz="1100"/>
+                      </a:pPr>
+                      <a:r>
+                        <a:rPr dirty="0"/>
+                        <a:t>Minutes</a:t>
+                      </a:r>
+                    </a:p>
+                  </a:txBody>
+                  <a:tcPr/>
+                </a:tc>
+                <a:extLst>
+                  <a:ext uri="{0D108BD9-81ED-4DB2-BD59-A6C34878D82A}">
+                    <a16:rowId xmlns:a16="http://schemas.microsoft.com/office/drawing/2014/main" val="10005"/>
                   </a:ext>
                 </a:extLst>
               </a:tr>
